--- a/docs/DEFENSE_DECK.pptx
+++ b/docs/DEFENSE_DECK.pptx
@@ -728,7 +728,7 @@
           <a:lstStyle/>
           <a:p>
             <a:r>
-              <a:t>This is the slide the whole project builds toward — protect its time. Every other number in the deck is measured INSIDE our own training distribution; this one is measured outside it, against an instrument we did not design, on people who never touched the app. Lead with the comparison, not the magnitude — 0.35 sounds modest until you say the baseline every commercial parental-control tool ships reaches 0.155 with a CI spanning zero, and our lead over it is itself significant. Pre-empt the two follow-ups: WHY NO SENSITIVITY/SPECIFICITY — one respondent scored in the disordered range; the script refuses caseness metrics below ten positives, a guard written before we saw the data. WHY KEEP THE GENRE MULTIPLIER — the null is underpowered (36%), not decisive, and removing it flips 34% of served bands; it stays flagged and env-tunable. Close on the two negative results: volunteer them. A validation study that only confirms is not one. (DEFENSE_NOTES §10)</a:t>
+              <a:t>This is the slide the whole project builds toward — protect its time. Every other number in the deck is measured INSIDE our own training distribution; this one is measured outside it, against an instrument we did not design, on people who never touched the app. Lead with the comparison, not the magnitude — 0.35 sounds modest until you say the baseline every commercial parental-control tool ships reaches 0.147 with a CI spanning zero — and volunteer that the paired delta grazes zero after the late batch, so the partial correlation (0.303, CI excluding zero) carries the incremental claim. Pre-empt the two follow-ups: WHY NO SENSITIVITY/SPECIFICITY — one respondent scored in the disordered range; the script refuses caseness metrics below ten positives, a guard written before we saw the data. WHY KEEP THE GENRE MULTIPLIER — the null is underpowered (36%), not decisive, and removing it flips 34% of served bands; it stays flagged and env-tunable. Close on the two negative results: volunteer them. A validation study that only confirms is not one. (DEFENSE_NOTES §10)</a:t>
             </a:r>
           </a:p>
         </p:txBody>
@@ -6422,7 +6422,7 @@
                 </a:solidFill>
                 <a:latin typeface="Calibri"/>
               </a:rPr>
-              <a:t>112 raw → 87 usable</a:t>
+              <a:t>134 raw → 104 usable</a:t>
             </a:r>
             <a:r>
               <a:rPr sz="1200" b="0">
@@ -6474,7 +6474,7 @@
                 </a:solidFill>
                 <a:latin typeface="Calibri"/>
               </a:rPr>
-              <a:t>ρ = 0.352</a:t>
+              <a:t>ρ = 0.317</a:t>
             </a:r>
             <a:r>
               <a:rPr sz="1200" b="0">
@@ -6483,7 +6483,7 @@
                 </a:solidFill>
                 <a:latin typeface="Calibri"/>
               </a:rPr>
-              <a:t> [0.158, 0.521] vs the clinical instrument — CI excludes zero</a:t>
+              <a:t> [0.137, 0.478] vs the clinical instrument — CI excludes zero</a:t>
             </a:r>
           </a:p>
           <a:p>
@@ -6508,7 +6508,7 @@
                 </a:solidFill>
                 <a:latin typeface="Calibri"/>
               </a:rPr>
-              <a:t>Beats the screen-time baseline it replaces</a:t>
+              <a:t>Leads the screen-time baseline it replaces</a:t>
             </a:r>
             <a:r>
               <a:rPr sz="1200" b="0">
@@ -6517,7 +6517,7 @@
                 </a:solidFill>
                 <a:latin typeface="Calibri"/>
               </a:rPr>
-              <a:t>: hours ρ = 0.155 (CI spans zero); paired </a:t>
+              <a:t> in 97.4 % of paired resamples: hours ρ = 0.147 (CI spans zero); Δρ = +0.167 [-0.002, 0.341] — </a:t>
             </a:r>
             <a:r>
               <a:rPr sz="1200" b="1">
@@ -6526,16 +6526,7 @@
                 </a:solidFill>
                 <a:latin typeface="Calibri"/>
               </a:rPr>
-              <a:t>Δρ = +0.195</a:t>
-            </a:r>
-            <a:r>
-              <a:rPr sz="1200" b="0">
-                <a:solidFill>
-                  <a:srgbClr val="14223C"/>
-                </a:solidFill>
-                <a:latin typeface="Calibri"/>
-              </a:rPr>
-              <a:t> [0.026, 0.372]</a:t>
+              <a:t>CI grazes zero; the partial carries the claim</a:t>
             </a:r>
           </a:p>
           <a:p>
@@ -6560,7 +6551,7 @@
                 </a:solidFill>
                 <a:latin typeface="Calibri"/>
               </a:rPr>
-              <a:t>0.349</a:t>
+              <a:t>0.303</a:t>
             </a:r>
             <a:r>
               <a:rPr sz="1200" b="0">
@@ -6603,7 +6594,7 @@
                 </a:solidFill>
                 <a:latin typeface="Calibri"/>
               </a:rPr>
-              <a:t> features (0.358) not </a:t>
+              <a:t> features (0.330) not </a:t>
             </a:r>
             <a:r>
               <a:rPr sz="1200" b="1">
@@ -6621,7 +6612,7 @@
                 </a:solidFill>
                 <a:latin typeface="Calibri"/>
               </a:rPr>
-              <a:t> (0.202, CI includes zero)</a:t>
+              <a:t> (0.128, CI includes zero)</a:t>
             </a:r>
           </a:p>
           <a:p>
@@ -6655,7 +6646,7 @@
                 </a:solidFill>
                 <a:latin typeface="Calibri"/>
               </a:rPr>
-              <a:t> us: genre multiplier p = 0.491; 3 of 5 proxy names track nothing → </a:t>
+              <a:t> us: genre multiplier p = 0.598; 4 of 5 proxy names track nothing → </a:t>
             </a:r>
             <a:r>
               <a:rPr sz="1200" b="1">
@@ -6785,7 +6776,7 @@
                           </a:solidFill>
                           <a:latin typeface="Calibri"/>
                         </a:rPr>
-                        <a:t>0.352</a:t>
+                        <a:t>0.317</a:t>
                       </a:r>
                     </a:p>
                   </a:txBody>
@@ -6807,7 +6798,7 @@
                           </a:solidFill>
                           <a:latin typeface="Calibri"/>
                         </a:rPr>
-                        <a:t>[0.158, 0.521]</a:t>
+                        <a:t>[0.137, 0.478]</a:t>
                       </a:r>
                     </a:p>
                   </a:txBody>
@@ -6853,7 +6844,7 @@
                           </a:solidFill>
                           <a:latin typeface="Calibri"/>
                         </a:rPr>
-                        <a:t>0.155</a:t>
+                        <a:t>0.147</a:t>
                       </a:r>
                     </a:p>
                   </a:txBody>
@@ -6875,7 +6866,7 @@
                           </a:solidFill>
                           <a:latin typeface="Calibri"/>
                         </a:rPr>
-                        <a:t>[-0.057, 0.376]</a:t>
+                        <a:t>[-0.053, 0.339]</a:t>
                       </a:r>
                     </a:p>
                   </a:txBody>
@@ -6921,7 +6912,7 @@
                           </a:solidFill>
                           <a:latin typeface="Calibri"/>
                         </a:rPr>
-                        <a:t>+0.195</a:t>
+                        <a:t>+0.167</a:t>
                       </a:r>
                     </a:p>
                   </a:txBody>
@@ -6943,7 +6934,7 @@
                           </a:solidFill>
                           <a:latin typeface="Calibri"/>
                         </a:rPr>
-                        <a:t>[0.026, 0.372]</a:t>
+                        <a:t>[-0.002, 0.341]</a:t>
                       </a:r>
                     </a:p>
                   </a:txBody>
@@ -6989,7 +6980,7 @@
                           </a:solidFill>
                           <a:latin typeface="Calibri"/>
                         </a:rPr>
-                        <a:t>0.349</a:t>
+                        <a:t>0.303</a:t>
                       </a:r>
                     </a:p>
                   </a:txBody>
@@ -7011,7 +7002,7 @@
                           </a:solidFill>
                           <a:latin typeface="Calibri"/>
                         </a:rPr>
-                        <a:t>[0.149, 0.521]</a:t>
+                        <a:t>[0.110, 0.476]</a:t>
                       </a:r>
                     </a:p>
                   </a:txBody>
@@ -7082,7 +7073,7 @@
                 </a:solidFill>
                 <a:latin typeface="Calibri"/>
               </a:rPr>
-              <a:t>98.6 %</a:t>
+              <a:t>97.4 %</a:t>
             </a:r>
             <a:r>
               <a:rPr sz="1200" b="0">
@@ -9227,7 +9218,7 @@
                 </a:solidFill>
                 <a:latin typeface="Calibri"/>
               </a:rPr>
-              <a:t> (ρ = 0.352, beats hours). Not validated: its </a:t>
+              <a:t> (ρ = 0.317; partial vs hours excludes zero). Not validated: its </a:t>
             </a:r>
             <a:r>
               <a:rPr sz="1500" b="1">
@@ -9655,7 +9646,7 @@
                 </a:solidFill>
                 <a:latin typeface="Calibri"/>
               </a:rPr>
-              <a:t>: ρ = 0.352 vs IGDS9-SF, beating the screen-time baseline — signal in </a:t>
+              <a:t>: ρ = 0.317 vs IGDS9-SF, leading the screen-time baseline (97 % of paired resamples) — signal in </a:t>
             </a:r>
             <a:r>
               <a:rPr sz="1700" b="1">
@@ -10415,7 +10406,7 @@
                           </a:solidFill>
                           <a:latin typeface="Calibri"/>
                         </a:rPr>
-                        <a:t>ρ = 0.352 vs clinical instrument</a:t>
+                        <a:t>ρ = 0.317 vs clinical instrument</a:t>
                       </a:r>
                       <a:r>
                         <a:rPr sz="1300" b="0">
@@ -10424,7 +10415,7 @@
                           </a:solidFill>
                           <a:latin typeface="Calibri"/>
                         </a:rPr>
-                        <a:t>, beats hours baseline</a:t>
+                        <a:t>, leads hours baseline (97% of paired resamples; partial excludes zero)</a:t>
                       </a:r>
                     </a:p>
                   </a:txBody>

--- a/docs/DEFENSE_DECK.pptx
+++ b/docs/DEFENSE_DECK.pptx
@@ -6612,7 +6612,25 @@
                 </a:solidFill>
                 <a:latin typeface="Calibri"/>
               </a:rPr>
-              <a:t> (0.128, CI includes zero)</a:t>
+              <a:t> (0.128) — formal paired contrast </a:t>
+            </a:r>
+            <a:r>
+              <a:rPr sz="1200" b="1">
+                <a:solidFill>
+                  <a:srgbClr val="14223C"/>
+                </a:solidFill>
+                <a:latin typeface="Calibri"/>
+              </a:rPr>
+              <a:t>+0.199 [0.019, 0.380]</a:t>
+            </a:r>
+            <a:r>
+              <a:rPr sz="1200" b="0">
+                <a:solidFill>
+                  <a:srgbClr val="14223C"/>
+                </a:solidFill>
+                <a:latin typeface="Calibri"/>
+              </a:rPr>
+              <a:t>, excludes zero</a:t>
             </a:r>
           </a:p>
           <a:p>

--- a/docs/DEFENSE_DECK.pptx
+++ b/docs/DEFENSE_DECK.pptx
@@ -7469,7 +7469,7 @@
                 </a:solidFill>
                 <a:latin typeface="Calibri"/>
               </a:rPr>
-              <a:t>: the IGDS9-SF survey (n = 87) — no open dataset pairs the instrument with the pattern variables we measure</a:t>
+              <a:t>: the IGDS9-SF survey (n = 104 usable) — no open dataset pairs the instrument with the pattern variables we measure</a:t>
             </a:r>
           </a:p>
           <a:p>
@@ -10279,7 +10279,7 @@
                           </a:solidFill>
                           <a:latin typeface="Calibri"/>
                         </a:rPr>
-                        <a:t> vs IGDS9-SF (n = 87); accent-fairness audit; 7 research-integrity guards</a:t>
+                        <a:t> vs IGDS9-SF (n = 103); accent-fairness audit; 7 research-integrity guards</a:t>
                       </a:r>
                     </a:p>
                   </a:txBody>

--- a/docs/DEFENSE_DECK.pptx
+++ b/docs/DEFENSE_DECK.pptx
@@ -518,7 +518,7 @@
           <a:lstStyle/>
           <a:p>
             <a:r>
-              <a:t>One sentence: "We built and deployed a complete parent-facing screening system — two Android apps and a cloud ML backend — and evaluated it the way ML should be evaluated: real data where it exists, honest numbers where it doesn't, and an external validation study that returned two results we did not want."</a:t>
+              <a:t>One sentence, identical from all four of us: "a deployed, multimodal screening system for parents that measures how a child plays, not just how long — externally validated against a clinical instrument, with its limitations named before you ask." If there is room: the study returned two results we did not want; we report both.</a:t>
             </a:r>
           </a:p>
         </p:txBody>
@@ -658,7 +658,7 @@
           <a:lstStyle/>
           <a:p>
             <a:r>
-              <a:t>This slide is what separates the project from "we trained a model." Every design choice has a measured counterfactual. Headline lesson: data &gt; architecture — losing domain data costs 31 PR-AUC points, more than every architecture choice combined — and three transformer benchmarks (Detoxify on chat, w2v2 on voice, MuRIL on Hindi) confirm it: capacity helps in-distribution, domain and register fit decide. Mention the reported NEGATIVE result: voice augmentation was measured and found neutral — we say so instead of hiding it. And now (slide 11) the pipeline output is anchored OUTSIDE its own training distribution. (DEFENSE_NOTES §6)</a:t>
+              <a:t>This slide is what separates the project from "we trained a model." Every design choice has a measured counterfactual. Headline lesson: data &gt; architecture — losing domain data costs 31 PR-AUC points, more than every architecture choice combined — and three transformer benchmarks (Detoxify on chat, w2v2 on voice, MuRIL on Hindi) confirm it: capacity helps in-distribution, domain and register fit decide. Mention the reported NEGATIVE result: voice augmentation was measured and found neutral — we say so instead of hiding it. And now (slide 12) the pipeline output is anchored OUTSIDE its own training distribution. (DEFENSE_NOTES §6)</a:t>
             </a:r>
           </a:p>
         </p:txBody>
@@ -728,7 +728,7 @@
           <a:lstStyle/>
           <a:p>
             <a:r>
-              <a:t>This is the slide the whole project builds toward — protect its time. Every other number in the deck is measured INSIDE our own training distribution; this one is measured outside it, against an instrument we did not design, on people who never touched the app. Lead with the comparison, not the magnitude — 0.35 sounds modest until you say the baseline every commercial parental-control tool ships reaches 0.147 with a CI spanning zero — and volunteer that the paired delta grazes zero after the late batch, so the partial correlation (0.303, CI excluding zero) carries the incremental claim. Pre-empt the two follow-ups: WHY NO SENSITIVITY/SPECIFICITY — one respondent scored in the disordered range; the script refuses caseness metrics below ten positives, a guard written before we saw the data. WHY KEEP THE GENRE MULTIPLIER — the null is underpowered (36%), not decisive, and removing it flips 34% of served bands; it stays flagged and env-tunable. Close on the two negative results: volunteer them. A validation study that only confirms is not one. (DEFENSE_NOTES §10)</a:t>
+              <a:t>This is the slide the whole project builds toward — protect its time. Every other number in the deck is measured INSIDE our own training distribution; this one is measured outside it, against an instrument we did not design, on people who never touched the app. Lead with the comparison, not the magnitude — 0.32 sounds modest until you say the baseline every commercial parental-control tool ships reaches 0.147 with a CI spanning zero — and volunteer that the paired delta grazes zero after the late batch, so the partial correlation (0.303, CI excluding zero) carries the incremental claim. Pre-empt the two follow-ups: WHY NO SENSITIVITY/SPECIFICITY — one respondent scored in the disordered range; the script refuses caseness metrics below ten positives, a guard written before we saw the data. WHY KEEP THE GENRE MULTIPLIER — the null is underpowered (32%), not decisive, and removing it flips 34% of served bands; it stays flagged and env-tunable. Close on the two negative results: volunteer them. A validation study that only confirms is not one. (DEFENSE_NOTES §10)</a:t>
             </a:r>
           </a:p>
         </p:txBody>
@@ -1148,7 +1148,7 @@
           <a:lstStyle/>
           <a:p>
             <a:r>
-              <a:t>Use this as the map for the panel: every Phase III expectation has a slide, a repo artefact and a number behind it. If time is short, this slide plus slides 11 and 13 carry the grade. Point at the artefact column — everything is reproducible from the public repository, and 7 CI tests fail the build if the paper and the data disagree.</a:t>
+              <a:t>Use this as the map for the panel: every Phase III expectation has a slide, a repo artefact and a number behind it. If time is short, this slide plus slides 12 and 14 carry the grade. Point at the artefact column — everything is reproducible from the public repository, and 7 CI tests fail the build if the paper and the data disagree.</a:t>
             </a:r>
           </a:p>
         </p:txBody>
@@ -1358,7 +1358,7 @@
           <a:lstStyle/>
           <a:p>
             <a:r>
-              <a:t>A missing channel contributes nothing rather than a fake neutral score — an earlier version imputed missing modalities and diluted real signal. Behaviour dominates because it is always eventually present and best measured. Say now: "the voice weight is lowest because we MEASURED it as the weakest channel — slide 7 shows that number honestly." (DEFENSE_NOTES §1, §5)</a:t>
+              <a:t>A missing channel contributes nothing rather than a fake neutral score — an earlier version imputed missing modalities and diluted real signal. Behaviour dominates because it is always eventually present and best measured. Say now: "the voice weight is lowest because we MEASURED it as the weakest channel — slide 8 shows that number honestly." (DEFENSE_NOTES §1, §5)</a:t>
             </a:r>
           </a:p>
         </p:txBody>
@@ -1428,7 +1428,7 @@
           <a:lstStyle/>
           <a:p>
             <a:r>
-              <a:t>Two attack points, answer both proactively. (1) Why RF, not deep learning: bake-off on tabular data — RF wins on accuracy-per-cost and gives SHAP-friendly explanations parents see. (2) Synthetic labels: no public dataset pairs device telemetry with addiction labels — we audited candidates (slide 13). Grounding: IGDS9-SF Latin-America (11,191 real MOBA players) fixes severity base rates; Gamers &amp; Anxiety (13,464) grounds behaviour–severity relations. The 20→10 feature cut: the 10 derived proxies are functions of the first 10; keeping them makes SHAP circular — ablation 0.9191 vs 0.9160, CIs overlap. Say plainly: 91.6% is a synthetic-distribution number; slide 11 is where the score meets real labels. (DEFENSE_NOTES §2)</a:t>
+              <a:t>Two attack points, answer both proactively. (1) Why RF, not deep learning: bake-off on tabular data — RF wins on accuracy-per-cost and gives SHAP-friendly explanations parents see. (2) Synthetic labels: no public dataset pairs device telemetry with addiction labels — we audited candidates (slide 13). Grounding: IGDS9-SF Latin-America (11,191 real MOBA players) fixes severity base rates; Gamers &amp; Anxiety (13,464) grounds behaviour–severity relations. The 20→10 feature cut: the 10 derived proxies are functions of the first 10; keeping them makes SHAP circular — ablation 0.9191 vs 0.9160, CIs overlap. Say plainly: 91.6% is a synthetic-distribution number; slide 12 is where the score meets real labels. (DEFENSE_NOTES §2)</a:t>
             </a:r>
           </a:p>
         </p:txBody>
@@ -1568,7 +1568,7 @@
           <a:lstStyle/>
           <a:p>
             <a:r>
-              <a:t>Pre-empt "57% is weak": chance on 4 classes is 25%; the interesting part is the 9-point gap — with random splits the model memorised VOICES, not emotions, and the split choice even flipped which model won the bake-off. An honest 0.574 beats an inflated 0.657 in front of any examiner. Transcription happens on-device; a short WAV goes up over HTTPS and raw audio is deleted server-side after feature extraction. Measured on hardware (slide 13): the default voice path costs ~14% of one core. Known gap (slide 15): acted adult emotion ≠ child gaming speech. (DEFENSE_NOTES §4)</a:t>
+              <a:t>Pre-empt "57% is weak": chance on 4 classes is 25%; the interesting part is the 8.3-point gap — with random splits the model memorised VOICES, not emotions, and the split choice even flipped which model won the bake-off. An honest 0.574 beats an inflated 0.657 in front of any examiner. Transcription happens on-device; a short WAV goes up over HTTPS and raw audio is deleted server-side after feature extraction. Measured on hardware (slide 14): the default voice path costs ~14% of one core. Known gap (slide 16): acted adult emotion ≠ child gaming speech. (DEFENSE_NOTES §4)</a:t>
             </a:r>
           </a:p>
         </p:txBody>
@@ -7820,7 +7820,7 @@
                 </a:solidFill>
                 <a:latin typeface="Calibri"/>
               </a:rPr>
-              <a:t>290 automated tests in CI</a:t>
+              <a:t>291 automated tests + 7 research-integrity guards, all in CI</a:t>
             </a:r>
             <a:r>
               <a:rPr sz="1400" b="0">
@@ -7829,7 +7829,7 @@
                 </a:solidFill>
                 <a:latin typeface="Calibri"/>
               </a:rPr>
-              <a:t>: 180 backend (run on </a:t>
+              <a:t>: 181 backend (run on </a:t>
             </a:r>
             <a:r>
               <a:rPr sz="1400" b="1">
@@ -7847,7 +7847,7 @@
                 </a:solidFill>
                 <a:latin typeface="Calibri"/>
               </a:rPr>
-              <a:t> SQLite &amp; Postgres 16) + 110 Android JVM + 7 research-integrity guards</a:t>
+              <a:t> SQLite &amp; Postgres 16) + 110 Android JVM; the guards fail the build if paper and data disagree</a:t>
             </a:r>
           </a:p>
           <a:p>
@@ -9279,7 +9279,7 @@
                 </a:solidFill>
                 <a:latin typeface="Calibri"/>
               </a:rPr>
-              <a:t> disordered-range respondent in 87 → need </a:t>
+              <a:t> disordered-range respondent in 104 usable → need </a:t>
             </a:r>
             <a:r>
               <a:rPr sz="1500" b="1">
@@ -9338,7 +9338,7 @@
                 </a:solidFill>
                 <a:latin typeface="Calibri"/>
               </a:rPr>
-              <a:t>▪  Voice trained on acted adult emotion (gap quantified: leakage 9 pts; missing domain data 32 PR-AUC pts); dual-STT fails our resource gate</a:t>
+              <a:t>▪  Voice trained on acted adult emotion (gap quantified: leakage 8.3 pts; missing domain data 31 PR-AUC pts); dual-STT fails our resource gate</a:t>
             </a:r>
           </a:p>
           <a:p>
@@ -10193,7 +10193,7 @@
                           </a:solidFill>
                           <a:latin typeface="Calibri"/>
                         </a:rPr>
-                        <a:t>290 automated tests in CI (backend on SQLite + Postgres, Android JVM); load smoke, API fuzz, CVE + MobSF audits; on-device resource drill on real hardware</a:t>
+                        <a:t>291 automated tests + 7 research-integrity guards in CI (backend on SQLite + Postgres, Android JVM, paper↔data guards); load smoke, API fuzz, CVE + MobSF audits; on-device resource drill on real hardware</a:t>
                       </a:r>
                     </a:p>
                   </a:txBody>
@@ -10569,7 +10569,7 @@
                           </a:solidFill>
                           <a:latin typeface="Calibri"/>
                         </a:rPr>
-                        <a:t>47-page paper: architecture, methodology, 11-dataset audit, results, ablations, external validation, fairness audit, ethics &amp; limitations, 44 references — numbers pinned to the data by CI</a:t>
+                        <a:t>48-page paper: architecture, methodology, 11-dataset audit, results, ablations, external validation, fairness audit, ethics &amp; limitations, 48 references — numbers pinned to the data by CI</a:t>
                       </a:r>
                     </a:p>
                   </a:txBody>
@@ -14202,7 +14202,7 @@
                 </a:solidFill>
                 <a:latin typeface="Calibri"/>
               </a:rPr>
-              <a:t>9 points was speaker leakage</a:t>
+              <a:t>8.3 points was speaker leakage</a:t>
             </a:r>
           </a:p>
           <a:p>
